--- a/pptx/midterm/REMUS_Midterm_Contents.pptx
+++ b/pptx/midterm/REMUS_Midterm_Contents.pptx
@@ -5,10 +5,10 @@
     <p:sldMasterId xmlns:r="http://schemas.openxmlformats.org/officeDocument/2006/relationships" id="2147483648" r:id="rId1"/>
   </p:sldMasterIdLst>
   <p:notesMasterIdLst>
-    <p:notesMasterId r:id="Rb583c8880f3f4da3"/>
+    <p:notesMasterId r:id="R4e98a437e1104ba1"/>
   </p:notesMasterIdLst>
   <p:sldIdLst>
-    <p:sldId id="256" r:id="R56030f4cb213413b"/>
+    <p:sldId id="256" r:id="R2f3bbd17dd6c486b"/>
   </p:sldIdLst>
   <p:sldSz cx="12192000" cy="6858000" type="screen16x9"/>
   <p:notesSz cx="6858000" cy="9144000"/>
@@ -815,6 +815,11 @@
           </a:bodyPr>
           <a:lstStyle xmlns:a="http://schemas.openxmlformats.org/drawingml/2006/main"/>
           <a:p xmlns:a="http://schemas.openxmlformats.org/drawingml/2006/main">
+            <a:pPr>
+              <a:lnSpc>
+                <a:spcPct val="90000"/>
+              </a:lnSpc>
+            </a:pPr>
             <a:r>
               <a:rPr lang="en-US" sz="3200" b="1">
                 <a:solidFill>

--- a/pptx/midterm/REMUS_Midterm_Contents.pptx
+++ b/pptx/midterm/REMUS_Midterm_Contents.pptx
@@ -5,10 +5,10 @@
     <p:sldMasterId xmlns:r="http://schemas.openxmlformats.org/officeDocument/2006/relationships" id="2147483648" r:id="rId1"/>
   </p:sldMasterIdLst>
   <p:notesMasterIdLst>
-    <p:notesMasterId r:id="R4e98a437e1104ba1"/>
+    <p:notesMasterId r:id="Rc4fc57d682904477"/>
   </p:notesMasterIdLst>
   <p:sldIdLst>
-    <p:sldId id="256" r:id="R2f3bbd17dd6c486b"/>
+    <p:sldId id="256" r:id="R9bf71f697ed946e0"/>
   </p:sldIdLst>
   <p:sldSz cx="12192000" cy="6858000" type="screen16x9"/>
   <p:notesSz cx="6858000" cy="9144000"/>
@@ -337,13 +337,13 @@
         <a:srgbClr val="E7E6E6"/>
       </a:lt2>
       <a:accent1>
-        <a:srgbClr val="183B56"/>
+        <a:srgbClr val="C00000"/>
       </a:accent1>
       <a:accent2>
-        <a:srgbClr val="008C95"/>
+        <a:srgbClr val="70AD47"/>
       </a:accent2>
       <a:accent3>
-        <a:srgbClr val="DF973E"/>
+        <a:srgbClr val="ED7D31"/>
       </a:accent3>
       <a:accent4>
         <a:srgbClr val="FFC000"/>
@@ -823,7 +823,7 @@
             <a:r>
               <a:rPr lang="en-US" sz="3200" b="1">
                 <a:solidFill>
-                  <a:srgbClr val="183B56"/>
+                  <a:srgbClr val="C00000"/>
                 </a:solidFill>
                 <a:latin typeface="Arial"/>
                 <a:ea typeface="Arial"/>
@@ -848,10 +848,12 @@
             <a:avLst/>
           </a:prstGeom>
           <a:solidFill>
-            <a:srgbClr val="008C95"/>
+            <a:srgbClr val="C55A11"/>
           </a:solidFill>
           <a:ln>
-            <a:noFill/>
+            <a:solidFill>
+              <a:srgbClr val="C55A11"/>
+            </a:solidFill>
           </a:ln>
         </p:spPr>
         <p:txBody>
@@ -862,7 +864,7 @@
           <a:p>
             <a:endParaRPr lang="en-US" sz="1800">
               <a:solidFill>
-                <a:srgbClr val="20354A"/>
+                <a:srgbClr val="C55A11"/>
               </a:solidFill>
               <a:latin typeface="Arial"/>
               <a:ea typeface="Arial"/>
@@ -885,7 +887,7 @@
             <a:avLst/>
           </a:prstGeom>
           <a:solidFill>
-            <a:srgbClr val="BDCBD4"/>
+            <a:srgbClr val="D1D1D1"/>
           </a:solidFill>
           <a:ln>
             <a:noFill/>
@@ -899,7 +901,7 @@
           <a:p>
             <a:endParaRPr lang="en-US" sz="1800">
               <a:solidFill>
-                <a:srgbClr val="20354A"/>
+                <a:srgbClr val="1F1F1F"/>
               </a:solidFill>
               <a:latin typeface="Arial"/>
               <a:ea typeface="Arial"/>
@@ -922,7 +924,7 @@
             <a:avLst/>
           </a:prstGeom>
           <a:solidFill>
-            <a:srgbClr val="008C95"/>
+            <a:srgbClr val="70AD47"/>
           </a:solidFill>
           <a:ln>
             <a:noFill/>
@@ -976,7 +978,7 @@
             <a:r>
               <a:rPr lang="en-US" sz="2700" b="1">
                 <a:solidFill>
-                  <a:srgbClr val="183B56"/>
+                  <a:srgbClr val="333333"/>
                 </a:solidFill>
                 <a:latin typeface="Arial"/>
                 <a:ea typeface="Arial"/>
@@ -1014,7 +1016,7 @@
             <a:r>
               <a:rPr lang="en-US" sz="1900">
                 <a:solidFill>
-                  <a:srgbClr val="607184"/>
+                  <a:srgbClr val="898989"/>
                 </a:solidFill>
                 <a:latin typeface="Arial"/>
                 <a:ea typeface="Arial"/>
@@ -1039,7 +1041,7 @@
             <a:avLst/>
           </a:prstGeom>
           <a:solidFill>
-            <a:srgbClr val="008C95"/>
+            <a:srgbClr val="70AD47"/>
           </a:solidFill>
           <a:ln>
             <a:noFill/>
@@ -1093,7 +1095,7 @@
             <a:r>
               <a:rPr lang="en-US" sz="2700" b="1">
                 <a:solidFill>
-                  <a:srgbClr val="183B56"/>
+                  <a:srgbClr val="333333"/>
                 </a:solidFill>
                 <a:latin typeface="Arial"/>
                 <a:ea typeface="Arial"/>
@@ -1131,7 +1133,7 @@
             <a:r>
               <a:rPr lang="en-US" sz="1900">
                 <a:solidFill>
-                  <a:srgbClr val="607184"/>
+                  <a:srgbClr val="898989"/>
                 </a:solidFill>
                 <a:latin typeface="Arial"/>
                 <a:ea typeface="Arial"/>
@@ -1156,7 +1158,7 @@
             <a:avLst/>
           </a:prstGeom>
           <a:solidFill>
-            <a:srgbClr val="008C95"/>
+            <a:srgbClr val="70AD47"/>
           </a:solidFill>
           <a:ln>
             <a:noFill/>
@@ -1210,7 +1212,7 @@
             <a:r>
               <a:rPr lang="en-US" sz="2700" b="1">
                 <a:solidFill>
-                  <a:srgbClr val="183B56"/>
+                  <a:srgbClr val="333333"/>
                 </a:solidFill>
                 <a:latin typeface="Arial"/>
                 <a:ea typeface="Arial"/>
@@ -1248,7 +1250,7 @@
             <a:r>
               <a:rPr lang="en-US" sz="1900">
                 <a:solidFill>
-                  <a:srgbClr val="607184"/>
+                  <a:srgbClr val="898989"/>
                 </a:solidFill>
                 <a:latin typeface="Arial"/>
                 <a:ea typeface="Arial"/>
@@ -1273,7 +1275,7 @@
             <a:avLst/>
           </a:prstGeom>
           <a:solidFill>
-            <a:srgbClr val="008C95"/>
+            <a:srgbClr val="70AD47"/>
           </a:solidFill>
           <a:ln>
             <a:noFill/>
@@ -1327,7 +1329,7 @@
             <a:r>
               <a:rPr lang="en-US" sz="2700" b="1">
                 <a:solidFill>
-                  <a:srgbClr val="183B56"/>
+                  <a:srgbClr val="333333"/>
                 </a:solidFill>
                 <a:latin typeface="Arial"/>
                 <a:ea typeface="Arial"/>
@@ -1365,7 +1367,7 @@
             <a:r>
               <a:rPr lang="en-US" sz="1900">
                 <a:solidFill>
-                  <a:srgbClr val="607184"/>
+                  <a:srgbClr val="898989"/>
                 </a:solidFill>
                 <a:latin typeface="Arial"/>
                 <a:ea typeface="Arial"/>
@@ -1397,13 +1399,13 @@
         <a:srgbClr val="E7E6E6"/>
       </a:lt2>
       <a:accent1>
-        <a:srgbClr val="183B56"/>
+        <a:srgbClr val="C00000"/>
       </a:accent1>
       <a:accent2>
-        <a:srgbClr val="008C95"/>
+        <a:srgbClr val="70AD47"/>
       </a:accent2>
       <a:accent3>
-        <a:srgbClr val="DF973E"/>
+        <a:srgbClr val="ED7D31"/>
       </a:accent3>
       <a:accent4>
         <a:srgbClr val="FFC000"/>
